--- a/LC UNIX/06 Archiving and Compression.pptx
+++ b/LC UNIX/06 Archiving and Compression.pptx
@@ -254,68 +254,31 @@
 </p:presentation>
 </file>
 
+<file path=ppt/revisionInfo.xml><?xml version="1.0" encoding="utf-8"?>
+<p1510:revInfo xmlns:a="http://schemas.openxmlformats.org/drawingml/2006/main" xmlns:r="http://schemas.openxmlformats.org/officeDocument/2006/relationships" xmlns:p1510="http://schemas.microsoft.com/office/powerpoint/2015/10/main">
+  <p1510:revLst>
+    <p1510:client id="{E7E9DA39-D982-4847-B799-4064F65EDC56}" v="3" dt="2026-03-11T13:21:44.543"/>
+  </p1510:revLst>
+</p1510:revInfo>
+</file>
+
 <file path=ppt/changesInfos/changesInfo1.xml><?xml version="1.0" encoding="utf-8"?>
 <pc:chgInfo xmlns:a="http://schemas.openxmlformats.org/drawingml/2006/main" xmlns:r="http://schemas.openxmlformats.org/officeDocument/2006/relationships" xmlns:ac="http://schemas.microsoft.com/office/drawing/2013/main/command" xmlns:pc="http://schemas.microsoft.com/office/powerpoint/2013/main/command">
   <pc:docChgLst>
-    <pc:chgData name="Baráth, Július" userId="aebde9b9-dccc-4475-a9ac-c05e78323d7a" providerId="ADAL" clId="{76B06D55-3DB5-8A4F-A457-E91FDCE1978B}"/>
-    <pc:docChg chg="undo custSel modSld sldOrd">
-      <pc:chgData name="Baráth, Július" userId="aebde9b9-dccc-4475-a9ac-c05e78323d7a" providerId="ADAL" clId="{76B06D55-3DB5-8A4F-A457-E91FDCE1978B}" dt="2025-03-28T09:14:20.542" v="179" actId="404"/>
+    <pc:chgData name="Baráth, Július" userId="aebde9b9-dccc-4475-a9ac-c05e78323d7a" providerId="ADAL" clId="{4A0811C8-ED2F-505E-B787-C8270CED5046}"/>
+    <pc:docChg chg="custSel modSld">
+      <pc:chgData name="Baráth, Július" userId="aebde9b9-dccc-4475-a9ac-c05e78323d7a" providerId="ADAL" clId="{4A0811C8-ED2F-505E-B787-C8270CED5046}" dt="2026-03-11T13:24:28.503" v="60" actId="20577"/>
       <pc:docMkLst>
         <pc:docMk/>
       </pc:docMkLst>
       <pc:sldChg chg="modSp mod">
-        <pc:chgData name="Baráth, Július" userId="aebde9b9-dccc-4475-a9ac-c05e78323d7a" providerId="ADAL" clId="{76B06D55-3DB5-8A4F-A457-E91FDCE1978B}" dt="2025-03-28T09:07:26.332" v="123" actId="404"/>
-        <pc:sldMkLst>
-          <pc:docMk/>
-          <pc:sldMk cId="0" sldId="257"/>
-        </pc:sldMkLst>
-        <pc:spChg chg="mod">
-          <ac:chgData name="Baráth, Július" userId="aebde9b9-dccc-4475-a9ac-c05e78323d7a" providerId="ADAL" clId="{76B06D55-3DB5-8A4F-A457-E91FDCE1978B}" dt="2025-03-28T09:07:26.332" v="123" actId="404"/>
-          <ac:spMkLst>
-            <pc:docMk/>
-            <pc:sldMk cId="0" sldId="257"/>
-            <ac:spMk id="26" creationId="{00000000-0000-0000-0000-000000000000}"/>
-          </ac:spMkLst>
-        </pc:spChg>
-      </pc:sldChg>
-      <pc:sldChg chg="modSp mod">
-        <pc:chgData name="Baráth, Július" userId="aebde9b9-dccc-4475-a9ac-c05e78323d7a" providerId="ADAL" clId="{76B06D55-3DB5-8A4F-A457-E91FDCE1978B}" dt="2025-03-28T09:14:20.542" v="179" actId="404"/>
-        <pc:sldMkLst>
-          <pc:docMk/>
-          <pc:sldMk cId="0" sldId="258"/>
-        </pc:sldMkLst>
-        <pc:spChg chg="mod">
-          <ac:chgData name="Baráth, Július" userId="aebde9b9-dccc-4475-a9ac-c05e78323d7a" providerId="ADAL" clId="{76B06D55-3DB5-8A4F-A457-E91FDCE1978B}" dt="2025-03-28T09:14:20.542" v="179" actId="404"/>
-          <ac:spMkLst>
-            <pc:docMk/>
-            <pc:sldMk cId="0" sldId="258"/>
-            <ac:spMk id="33" creationId="{00000000-0000-0000-0000-000000000000}"/>
-          </ac:spMkLst>
-        </pc:spChg>
-      </pc:sldChg>
-      <pc:sldChg chg="modSp mod">
-        <pc:chgData name="Baráth, Július" userId="aebde9b9-dccc-4475-a9ac-c05e78323d7a" providerId="ADAL" clId="{76B06D55-3DB5-8A4F-A457-E91FDCE1978B}" dt="2025-03-25T09:46:13.116" v="34" actId="1036"/>
-        <pc:sldMkLst>
-          <pc:docMk/>
-          <pc:sldMk cId="0" sldId="259"/>
-        </pc:sldMkLst>
-        <pc:spChg chg="mod">
-          <ac:chgData name="Baráth, Július" userId="aebde9b9-dccc-4475-a9ac-c05e78323d7a" providerId="ADAL" clId="{76B06D55-3DB5-8A4F-A457-E91FDCE1978B}" dt="2025-03-25T09:46:13.116" v="34" actId="1036"/>
-          <ac:spMkLst>
-            <pc:docMk/>
-            <pc:sldMk cId="0" sldId="259"/>
-            <ac:spMk id="40" creationId="{00000000-0000-0000-0000-000000000000}"/>
-          </ac:spMkLst>
-        </pc:spChg>
-      </pc:sldChg>
-      <pc:sldChg chg="modSp mod">
-        <pc:chgData name="Baráth, Július" userId="aebde9b9-dccc-4475-a9ac-c05e78323d7a" providerId="ADAL" clId="{76B06D55-3DB5-8A4F-A457-E91FDCE1978B}" dt="2025-03-28T09:13:01.401" v="172" actId="404"/>
+        <pc:chgData name="Baráth, Július" userId="aebde9b9-dccc-4475-a9ac-c05e78323d7a" providerId="ADAL" clId="{4A0811C8-ED2F-505E-B787-C8270CED5046}" dt="2026-03-11T13:18:10.050" v="28" actId="5793"/>
         <pc:sldMkLst>
           <pc:docMk/>
           <pc:sldMk cId="0" sldId="260"/>
         </pc:sldMkLst>
         <pc:spChg chg="mod">
-          <ac:chgData name="Baráth, Július" userId="aebde9b9-dccc-4475-a9ac-c05e78323d7a" providerId="ADAL" clId="{76B06D55-3DB5-8A4F-A457-E91FDCE1978B}" dt="2025-03-28T09:13:01.401" v="172" actId="404"/>
+          <ac:chgData name="Baráth, Július" userId="aebde9b9-dccc-4475-a9ac-c05e78323d7a" providerId="ADAL" clId="{4A0811C8-ED2F-505E-B787-C8270CED5046}" dt="2026-03-11T13:18:10.050" v="28" actId="5793"/>
           <ac:spMkLst>
             <pc:docMk/>
             <pc:sldMk cId="0" sldId="260"/>
@@ -323,103 +286,20 @@
           </ac:spMkLst>
         </pc:spChg>
       </pc:sldChg>
-      <pc:sldChg chg="modSp mod ord">
-        <pc:chgData name="Baráth, Július" userId="aebde9b9-dccc-4475-a9ac-c05e78323d7a" providerId="ADAL" clId="{76B06D55-3DB5-8A4F-A457-E91FDCE1978B}" dt="2025-03-28T09:13:44.862" v="174" actId="20578"/>
-        <pc:sldMkLst>
-          <pc:docMk/>
-          <pc:sldMk cId="0" sldId="263"/>
-        </pc:sldMkLst>
-        <pc:spChg chg="mod">
-          <ac:chgData name="Baráth, Július" userId="aebde9b9-dccc-4475-a9ac-c05e78323d7a" providerId="ADAL" clId="{76B06D55-3DB5-8A4F-A457-E91FDCE1978B}" dt="2025-03-25T09:51:54.858" v="60" actId="113"/>
-          <ac:spMkLst>
-            <pc:docMk/>
-            <pc:sldMk cId="0" sldId="263"/>
-            <ac:spMk id="68" creationId="{00000000-0000-0000-0000-000000000000}"/>
-          </ac:spMkLst>
-        </pc:spChg>
-      </pc:sldChg>
-      <pc:sldChg chg="ord">
-        <pc:chgData name="Baráth, Július" userId="aebde9b9-dccc-4475-a9ac-c05e78323d7a" providerId="ADAL" clId="{76B06D55-3DB5-8A4F-A457-E91FDCE1978B}" dt="2025-03-28T09:13:33.158" v="173" actId="20578"/>
-        <pc:sldMkLst>
-          <pc:docMk/>
-          <pc:sldMk cId="0" sldId="264"/>
-        </pc:sldMkLst>
-      </pc:sldChg>
-    </pc:docChg>
-  </pc:docChgLst>
-  <pc:docChgLst>
-    <pc:chgData name="Baráth, Július" userId="aebde9b9-dccc-4475-a9ac-c05e78323d7a" providerId="ADAL" clId="{7E64E23F-DDD5-B344-A102-997DB99EBA9E}"/>
-    <pc:docChg chg="custSel modSld">
-      <pc:chgData name="Baráth, Július" userId="aebde9b9-dccc-4475-a9ac-c05e78323d7a" providerId="ADAL" clId="{7E64E23F-DDD5-B344-A102-997DB99EBA9E}" dt="2023-03-17T07:38:06.236" v="50" actId="20577"/>
-      <pc:docMkLst>
-        <pc:docMk/>
-      </pc:docMkLst>
       <pc:sldChg chg="modSp mod">
-        <pc:chgData name="Baráth, Július" userId="aebde9b9-dccc-4475-a9ac-c05e78323d7a" providerId="ADAL" clId="{7E64E23F-DDD5-B344-A102-997DB99EBA9E}" dt="2023-03-17T07:38:06.236" v="50" actId="20577"/>
+        <pc:chgData name="Baráth, Július" userId="aebde9b9-dccc-4475-a9ac-c05e78323d7a" providerId="ADAL" clId="{4A0811C8-ED2F-505E-B787-C8270CED5046}" dt="2026-03-11T13:24:28.503" v="60" actId="20577"/>
         <pc:sldMkLst>
           <pc:docMk/>
           <pc:sldMk cId="0" sldId="266"/>
         </pc:sldMkLst>
-      </pc:sldChg>
-    </pc:docChg>
-  </pc:docChgLst>
-  <pc:docChgLst>
-    <pc:chgData name="Baráth, Július" userId="S::julius.barath@aos.sk::aebde9b9-dccc-4475-a9ac-c05e78323d7a" providerId="AD" clId="Web-{BB755127-32E2-D102-D48A-E8F4522EDCD9}"/>
-    <pc:docChg chg="modSld">
-      <pc:chgData name="Baráth, Július" userId="S::julius.barath@aos.sk::aebde9b9-dccc-4475-a9ac-c05e78323d7a" providerId="AD" clId="Web-{BB755127-32E2-D102-D48A-E8F4522EDCD9}" dt="2023-12-19T09:52:24.484" v="4" actId="20577"/>
-      <pc:docMkLst>
-        <pc:docMk/>
-      </pc:docMkLst>
-      <pc:sldChg chg="modSp">
-        <pc:chgData name="Baráth, Július" userId="S::julius.barath@aos.sk::aebde9b9-dccc-4475-a9ac-c05e78323d7a" providerId="AD" clId="Web-{BB755127-32E2-D102-D48A-E8F4522EDCD9}" dt="2023-12-19T09:52:24.484" v="4" actId="20577"/>
-        <pc:sldMkLst>
-          <pc:docMk/>
-          <pc:sldMk cId="0" sldId="266"/>
-        </pc:sldMkLst>
-      </pc:sldChg>
-    </pc:docChg>
-  </pc:docChgLst>
-  <pc:docChgLst>
-    <pc:chgData name="Baráth, Július" userId="aebde9b9-dccc-4475-a9ac-c05e78323d7a" providerId="ADAL" clId="{62B813C2-2C6B-8844-A1AB-EABC3B040B4C}"/>
-    <pc:docChg chg="undo custSel modSld">
-      <pc:chgData name="Baráth, Július" userId="aebde9b9-dccc-4475-a9ac-c05e78323d7a" providerId="ADAL" clId="{62B813C2-2C6B-8844-A1AB-EABC3B040B4C}" dt="2024-03-19T12:43:33.741" v="116" actId="20577"/>
-      <pc:docMkLst>
-        <pc:docMk/>
-      </pc:docMkLst>
-      <pc:sldChg chg="modSp mod chgLayout">
-        <pc:chgData name="Baráth, Július" userId="aebde9b9-dccc-4475-a9ac-c05e78323d7a" providerId="ADAL" clId="{62B813C2-2C6B-8844-A1AB-EABC3B040B4C}" dt="2024-03-18T09:24:14.617" v="28" actId="108"/>
-        <pc:sldMkLst>
-          <pc:docMk/>
-          <pc:sldMk cId="0" sldId="257"/>
-        </pc:sldMkLst>
-      </pc:sldChg>
-      <pc:sldChg chg="modSp mod">
-        <pc:chgData name="Baráth, Július" userId="aebde9b9-dccc-4475-a9ac-c05e78323d7a" providerId="ADAL" clId="{62B813C2-2C6B-8844-A1AB-EABC3B040B4C}" dt="2024-03-18T09:36:17.726" v="41" actId="6549"/>
-        <pc:sldMkLst>
-          <pc:docMk/>
-          <pc:sldMk cId="0" sldId="259"/>
-        </pc:sldMkLst>
-      </pc:sldChg>
-      <pc:sldChg chg="modSp mod">
-        <pc:chgData name="Baráth, Július" userId="aebde9b9-dccc-4475-a9ac-c05e78323d7a" providerId="ADAL" clId="{62B813C2-2C6B-8844-A1AB-EABC3B040B4C}" dt="2024-03-19T12:43:33.741" v="116" actId="20577"/>
-        <pc:sldMkLst>
-          <pc:docMk/>
-          <pc:sldMk cId="0" sldId="260"/>
-        </pc:sldMkLst>
-      </pc:sldChg>
-      <pc:sldChg chg="modSp mod">
-        <pc:chgData name="Baráth, Július" userId="aebde9b9-dccc-4475-a9ac-c05e78323d7a" providerId="ADAL" clId="{62B813C2-2C6B-8844-A1AB-EABC3B040B4C}" dt="2024-03-18T10:12:45.486" v="60" actId="113"/>
-        <pc:sldMkLst>
-          <pc:docMk/>
-          <pc:sldMk cId="0" sldId="261"/>
-        </pc:sldMkLst>
-      </pc:sldChg>
-      <pc:sldChg chg="modSp mod">
-        <pc:chgData name="Baráth, Július" userId="aebde9b9-dccc-4475-a9ac-c05e78323d7a" providerId="ADAL" clId="{62B813C2-2C6B-8844-A1AB-EABC3B040B4C}" dt="2024-03-18T10:29:30.013" v="84" actId="6549"/>
-        <pc:sldMkLst>
-          <pc:docMk/>
-          <pc:sldMk cId="0" sldId="266"/>
-        </pc:sldMkLst>
+        <pc:spChg chg="mod">
+          <ac:chgData name="Baráth, Július" userId="aebde9b9-dccc-4475-a9ac-c05e78323d7a" providerId="ADAL" clId="{4A0811C8-ED2F-505E-B787-C8270CED5046}" dt="2026-03-11T13:24:28.503" v="60" actId="20577"/>
+          <ac:spMkLst>
+            <pc:docMk/>
+            <pc:sldMk cId="0" sldId="266"/>
+            <ac:spMk id="89" creationId="{00000000-0000-0000-0000-000000000000}"/>
+          </ac:spMkLst>
+        </pc:spChg>
       </pc:sldChg>
     </pc:docChg>
   </pc:docChgLst>
@@ -4580,7 +4460,31 @@
                 <a:cs typeface="arial"/>
                 <a:sym typeface="arial"/>
               </a:rPr>
-              <a:t> - if compressing directory</a:t>
+              <a:t> </a:t>
+            </a:r>
+            <a:r>
+              <a:rPr lang="en-US" sz="2800">
+                <a:solidFill>
+                  <a:srgbClr val="666666"/>
+                </a:solidFill>
+                <a:latin typeface="arial"/>
+                <a:ea typeface="arial"/>
+                <a:cs typeface="arial"/>
+                <a:sym typeface="arial"/>
+              </a:rPr>
+              <a:t>- recurse-path if </a:t>
+            </a:r>
+            <a:r>
+              <a:rPr lang="en-US" sz="2800" dirty="0">
+                <a:solidFill>
+                  <a:srgbClr val="666666"/>
+                </a:solidFill>
+                <a:latin typeface="arial"/>
+                <a:ea typeface="arial"/>
+                <a:cs typeface="arial"/>
+                <a:sym typeface="arial"/>
+              </a:rPr>
+              <a:t>compressing directory</a:t>
             </a:r>
             <a:endParaRPr lang="en-US" sz="2800" dirty="0">
               <a:solidFill>
@@ -4631,16 +4535,39 @@
                 <a:cs typeface="arial"/>
                 <a:sym typeface="arial"/>
               </a:rPr>
-              <a:t> - removes files added to archive (to save space on disk)</a:t>
-            </a:r>
-            <a:endParaRPr lang="en-US" sz="2800" dirty="0">
-              <a:solidFill>
+              <a:t> - moves files to archive (to save space on disk)</a:t>
+            </a:r>
+          </a:p>
+          <a:p>
+            <a:pPr marL="762000" lvl="1" indent="-262255">
+              <a:buClr>
                 <a:srgbClr val="666666"/>
-              </a:solidFill>
-              <a:latin typeface="arial"/>
-              <a:ea typeface="arial"/>
-              <a:cs typeface="arial"/>
-            </a:endParaRPr>
+              </a:buClr>
+              <a:buSzPct val="101010"/>
+              <a:buFont typeface="Courier New"/>
+              <a:buChar char="o"/>
+            </a:pPr>
+            <a:r>
+              <a:rPr lang="en-US" sz="2800" dirty="0">
+                <a:solidFill>
+                  <a:srgbClr val="666666"/>
+                </a:solidFill>
+                <a:latin typeface="Courier New"/>
+                <a:cs typeface="Courier New"/>
+              </a:rPr>
+              <a:t>-d </a:t>
+            </a:r>
+            <a:r>
+              <a:rPr lang="en-US" sz="2800" dirty="0">
+                <a:solidFill>
+                  <a:srgbClr val="666666"/>
+                </a:solidFill>
+                <a:latin typeface="arial"/>
+                <a:ea typeface="arial"/>
+                <a:cs typeface="arial"/>
+              </a:rPr>
+              <a:t>- delete entries from a zip archive</a:t>
+            </a:r>
           </a:p>
           <a:p>
             <a:pPr marL="762000" marR="0" lvl="1" indent="-262255" rtl="0">
@@ -8719,6 +8646,187 @@
               </a:solidFill>
               <a:latin typeface="Courier New"/>
               <a:ea typeface="Courier New"/>
+              <a:cs typeface="Courier New"/>
+              <a:sym typeface="courier new"/>
+            </a:endParaRPr>
+          </a:p>
+          <a:p>
+            <a:pPr marL="381000" indent="-262466">
+              <a:buClr>
+                <a:srgbClr val="666666"/>
+              </a:buClr>
+              <a:buSzPct val="168350"/>
+              <a:buFont typeface="Arial"/>
+              <a:buChar char="•"/>
+            </a:pPr>
+            <a:r>
+              <a:rPr lang="en-US" sz="3333" dirty="0">
+                <a:solidFill>
+                  <a:srgbClr val="666666"/>
+                </a:solidFill>
+                <a:sym typeface="courier new"/>
+              </a:rPr>
+              <a:t>Je </a:t>
+            </a:r>
+            <a:r>
+              <a:rPr lang="en-US" sz="3333" dirty="0" err="1">
+                <a:solidFill>
+                  <a:srgbClr val="666666"/>
+                </a:solidFill>
+                <a:sym typeface="courier new"/>
+              </a:rPr>
+              <a:t>možné</a:t>
+            </a:r>
+            <a:r>
+              <a:rPr lang="en-US" sz="3333" dirty="0">
+                <a:solidFill>
+                  <a:srgbClr val="666666"/>
+                </a:solidFill>
+                <a:sym typeface="courier new"/>
+              </a:rPr>
+              <a:t> </a:t>
+            </a:r>
+            <a:r>
+              <a:rPr lang="en-US" sz="3333" dirty="0" err="1">
+                <a:solidFill>
+                  <a:srgbClr val="666666"/>
+                </a:solidFill>
+                <a:sym typeface="courier new"/>
+              </a:rPr>
+              <a:t>aj</a:t>
+            </a:r>
+            <a:r>
+              <a:rPr lang="en-US" sz="3333" dirty="0">
+                <a:solidFill>
+                  <a:srgbClr val="666666"/>
+                </a:solidFill>
+                <a:sym typeface="courier new"/>
+              </a:rPr>
+              <a:t> s tar …</a:t>
+            </a:r>
+          </a:p>
+          <a:p>
+            <a:pPr marL="118534" lvl="0">
+              <a:buClr>
+                <a:srgbClr val="666666"/>
+              </a:buClr>
+              <a:buSzPct val="168350"/>
+            </a:pPr>
+            <a:r>
+              <a:rPr lang="sk-SK" sz="3333" dirty="0">
+                <a:solidFill>
+                  <a:srgbClr val="666666"/>
+                </a:solidFill>
+                <a:latin typeface="Courier New"/>
+                <a:cs typeface="Courier New"/>
+              </a:rPr>
+              <a:t>$</a:t>
+            </a:r>
+            <a:r>
+              <a:rPr lang="sk-SK" sz="3333" dirty="0" err="1">
+                <a:solidFill>
+                  <a:srgbClr val="666666"/>
+                </a:solidFill>
+                <a:latin typeface="Courier New"/>
+                <a:cs typeface="Courier New"/>
+              </a:rPr>
+              <a:t>tar</a:t>
+            </a:r>
+            <a:r>
+              <a:rPr lang="sk-SK" sz="3333" dirty="0">
+                <a:solidFill>
+                  <a:srgbClr val="666666"/>
+                </a:solidFill>
+                <a:latin typeface="Courier New"/>
+                <a:cs typeface="Courier New"/>
+              </a:rPr>
+              <a:t> -</a:t>
+            </a:r>
+            <a:r>
+              <a:rPr lang="sk-SK" sz="3333" dirty="0" err="1">
+                <a:solidFill>
+                  <a:srgbClr val="666666"/>
+                </a:solidFill>
+                <a:latin typeface="Courier New"/>
+                <a:cs typeface="Courier New"/>
+              </a:rPr>
+              <a:t>cvf</a:t>
+            </a:r>
+            <a:r>
+              <a:rPr lang="sk-SK" sz="3333" dirty="0">
+                <a:solidFill>
+                  <a:srgbClr val="666666"/>
+                </a:solidFill>
+                <a:latin typeface="Courier New"/>
+                <a:cs typeface="Courier New"/>
+              </a:rPr>
+              <a:t> </a:t>
+            </a:r>
+            <a:r>
+              <a:rPr lang="sk-SK" sz="3333" dirty="0" err="1">
+                <a:solidFill>
+                  <a:srgbClr val="666666"/>
+                </a:solidFill>
+                <a:latin typeface="Courier New"/>
+                <a:cs typeface="Courier New"/>
+              </a:rPr>
+              <a:t>archiv.tar</a:t>
+            </a:r>
+            <a:r>
+              <a:rPr lang="sk-SK" sz="3333" dirty="0">
+                <a:solidFill>
+                  <a:srgbClr val="666666"/>
+                </a:solidFill>
+                <a:latin typeface="Courier New"/>
+                <a:cs typeface="Courier New"/>
+              </a:rPr>
+              <a:t> --</a:t>
+            </a:r>
+            <a:r>
+              <a:rPr lang="sk-SK" sz="3333" dirty="0" err="1">
+                <a:solidFill>
+                  <a:srgbClr val="666666"/>
+                </a:solidFill>
+                <a:latin typeface="Courier New"/>
+                <a:cs typeface="Courier New"/>
+              </a:rPr>
+              <a:t>files-from</a:t>
+            </a:r>
+            <a:r>
+              <a:rPr lang="sk-SK" sz="3333" dirty="0">
+                <a:solidFill>
+                  <a:srgbClr val="666666"/>
+                </a:solidFill>
+                <a:latin typeface="Courier New"/>
+                <a:cs typeface="Courier New"/>
+              </a:rPr>
+              <a:t>=&lt;(</a:t>
+            </a:r>
+            <a:r>
+              <a:rPr lang="sk-SK" sz="3333" dirty="0" err="1">
+                <a:solidFill>
+                  <a:srgbClr val="666666"/>
+                </a:solidFill>
+                <a:latin typeface="Courier New"/>
+                <a:cs typeface="Courier New"/>
+              </a:rPr>
+              <a:t>ls</a:t>
+            </a:r>
+            <a:r>
+              <a:rPr lang="sk-SK" sz="3333" dirty="0">
+                <a:solidFill>
+                  <a:srgbClr val="666666"/>
+                </a:solidFill>
+                <a:latin typeface="Courier New"/>
+                <a:cs typeface="Courier New"/>
+              </a:rPr>
+              <a:t>)</a:t>
+            </a:r>
+            <a:endParaRPr lang="en-US" sz="3333" dirty="0">
+              <a:solidFill>
+                <a:srgbClr val="666666"/>
+              </a:solidFill>
+              <a:latin typeface="Courier New"/>
               <a:cs typeface="Courier New"/>
               <a:sym typeface="courier new"/>
             </a:endParaRPr>
